--- a/3-Jenkins/Lab2.pptx
+++ b/3-Jenkins/Lab2.pptx
@@ -273,7 +273,7 @@
           <a:p>
             <a:fld id="{DEE6B2CF-0566-43C4-B778-CF73F2BEE112}" type="datetimeFigureOut">
               <a:rPr lang="en-GB" smtClean="0"/>
-              <a:t>13/09/2024</a:t>
+              <a:t>25/02/2026</a:t>
             </a:fld>
             <a:endParaRPr lang="en-GB"/>
           </a:p>
@@ -473,7 +473,7 @@
           <a:p>
             <a:fld id="{DEE6B2CF-0566-43C4-B778-CF73F2BEE112}" type="datetimeFigureOut">
               <a:rPr lang="en-GB" smtClean="0"/>
-              <a:t>13/09/2024</a:t>
+              <a:t>25/02/2026</a:t>
             </a:fld>
             <a:endParaRPr lang="en-GB"/>
           </a:p>
@@ -683,7 +683,7 @@
           <a:p>
             <a:fld id="{DEE6B2CF-0566-43C4-B778-CF73F2BEE112}" type="datetimeFigureOut">
               <a:rPr lang="en-GB" smtClean="0"/>
-              <a:t>13/09/2024</a:t>
+              <a:t>25/02/2026</a:t>
             </a:fld>
             <a:endParaRPr lang="en-GB"/>
           </a:p>
@@ -883,7 +883,7 @@
           <a:p>
             <a:fld id="{DEE6B2CF-0566-43C4-B778-CF73F2BEE112}" type="datetimeFigureOut">
               <a:rPr lang="en-GB" smtClean="0"/>
-              <a:t>13/09/2024</a:t>
+              <a:t>25/02/2026</a:t>
             </a:fld>
             <a:endParaRPr lang="en-GB"/>
           </a:p>
@@ -1159,7 +1159,7 @@
           <a:p>
             <a:fld id="{DEE6B2CF-0566-43C4-B778-CF73F2BEE112}" type="datetimeFigureOut">
               <a:rPr lang="en-GB" smtClean="0"/>
-              <a:t>13/09/2024</a:t>
+              <a:t>25/02/2026</a:t>
             </a:fld>
             <a:endParaRPr lang="en-GB"/>
           </a:p>
@@ -1427,7 +1427,7 @@
           <a:p>
             <a:fld id="{DEE6B2CF-0566-43C4-B778-CF73F2BEE112}" type="datetimeFigureOut">
               <a:rPr lang="en-GB" smtClean="0"/>
-              <a:t>13/09/2024</a:t>
+              <a:t>25/02/2026</a:t>
             </a:fld>
             <a:endParaRPr lang="en-GB"/>
           </a:p>
@@ -1842,7 +1842,7 @@
           <a:p>
             <a:fld id="{DEE6B2CF-0566-43C4-B778-CF73F2BEE112}" type="datetimeFigureOut">
               <a:rPr lang="en-GB" smtClean="0"/>
-              <a:t>13/09/2024</a:t>
+              <a:t>25/02/2026</a:t>
             </a:fld>
             <a:endParaRPr lang="en-GB"/>
           </a:p>
@@ -1984,7 +1984,7 @@
           <a:p>
             <a:fld id="{DEE6B2CF-0566-43C4-B778-CF73F2BEE112}" type="datetimeFigureOut">
               <a:rPr lang="en-GB" smtClean="0"/>
-              <a:t>13/09/2024</a:t>
+              <a:t>25/02/2026</a:t>
             </a:fld>
             <a:endParaRPr lang="en-GB"/>
           </a:p>
@@ -2097,7 +2097,7 @@
           <a:p>
             <a:fld id="{DEE6B2CF-0566-43C4-B778-CF73F2BEE112}" type="datetimeFigureOut">
               <a:rPr lang="en-GB" smtClean="0"/>
-              <a:t>13/09/2024</a:t>
+              <a:t>25/02/2026</a:t>
             </a:fld>
             <a:endParaRPr lang="en-GB"/>
           </a:p>
@@ -2410,7 +2410,7 @@
           <a:p>
             <a:fld id="{DEE6B2CF-0566-43C4-B778-CF73F2BEE112}" type="datetimeFigureOut">
               <a:rPr lang="en-GB" smtClean="0"/>
-              <a:t>13/09/2024</a:t>
+              <a:t>25/02/2026</a:t>
             </a:fld>
             <a:endParaRPr lang="en-GB"/>
           </a:p>
@@ -2699,7 +2699,7 @@
           <a:p>
             <a:fld id="{DEE6B2CF-0566-43C4-B778-CF73F2BEE112}" type="datetimeFigureOut">
               <a:rPr lang="en-GB" smtClean="0"/>
-              <a:t>13/09/2024</a:t>
+              <a:t>25/02/2026</a:t>
             </a:fld>
             <a:endParaRPr lang="en-GB"/>
           </a:p>
@@ -2942,7 +2942,7 @@
           <a:p>
             <a:fld id="{DEE6B2CF-0566-43C4-B778-CF73F2BEE112}" type="datetimeFigureOut">
               <a:rPr lang="en-GB" smtClean="0"/>
-              <a:t>13/09/2024</a:t>
+              <a:t>25/02/2026</a:t>
             </a:fld>
             <a:endParaRPr lang="en-GB"/>
           </a:p>
@@ -7055,7 +7055,17 @@
                 <a:effectLst/>
                 <a:latin typeface="Consolas" panose="020B0609020204030204" pitchFamily="49" charset="0"/>
               </a:rPr>
-              <a:t>/jenkins:lts-jdk11</a:t>
+              <a:t>/</a:t>
+            </a:r>
+            <a:r>
+              <a:rPr lang="en-GB" sz="1600" b="1" i="0" dirty="0" err="1">
+                <a:solidFill>
+                  <a:srgbClr val="C5C8C6"/>
+                </a:solidFill>
+                <a:effectLst/>
+                <a:latin typeface="Consolas" panose="020B0609020204030204" pitchFamily="49" charset="0"/>
+              </a:rPr>
+              <a:t>jenkins:lts</a:t>
             </a:r>
             <a:endParaRPr lang="en-GB" sz="1600" b="1" dirty="0"/>
           </a:p>
